--- a/assets/presentations/2026-03-29-hosanna.pptx
+++ b/assets/presentations/2026-03-29-hosanna.pptx
@@ -1481,7 +1481,7 @@
         </p:nvSpPr>
         <p:spPr>
           <a:xfrm xmlns:a="http://schemas.openxmlformats.org/drawingml/2006/main">
-            <a:off x="3943350" y="1381125"/>
+            <a:off x="762000" y="1381125"/>
             <a:ext cx="4305300" cy="1581150"/>
           </a:xfrm>
           <a:prstGeom xmlns:a="http://schemas.openxmlformats.org/drawingml/2006/main" prst="roundRect">
@@ -1513,7 +1513,7 @@
         </p:nvSpPr>
         <p:spPr>
           <a:xfrm xmlns:a="http://schemas.openxmlformats.org/drawingml/2006/main">
-            <a:off x="4514850" y="1552575"/>
+            <a:off x="1333500" y="1552575"/>
             <a:ext cx="3162300" cy="742950"/>
           </a:xfrm>
           <a:prstGeom xmlns:a="http://schemas.openxmlformats.org/drawingml/2006/main" prst="rect">
@@ -1597,7 +1597,7 @@
         </p:nvSpPr>
         <p:spPr>
           <a:xfrm xmlns:a="http://schemas.openxmlformats.org/drawingml/2006/main">
-            <a:off x="4305300" y="2200275"/>
+            <a:off x="1123950" y="2200275"/>
             <a:ext cx="3848100" cy="457200"/>
           </a:xfrm>
           <a:prstGeom xmlns:a="http://schemas.openxmlformats.org/drawingml/2006/main" prst="rect">

--- a/assets/presentations/2026-03-29-hosanna.pptx
+++ b/assets/presentations/2026-03-29-hosanna.pptx
@@ -2,15 +2,15 @@
 <file path=ppt/presentation.xml><?xml version="1.0" encoding="utf-8"?>
 <p:presentation xmlns:p="http://schemas.openxmlformats.org/presentationml/2006/main">
   <p:sldMasterIdLst>
-    <p:sldMasterId xmlns:r="http://schemas.openxmlformats.org/officeDocument/2006/relationships" id="2147483648" r:id="Rf3254ca1d12e4108"/>
+    <p:sldMasterId xmlns:r="http://schemas.openxmlformats.org/officeDocument/2006/relationships" id="2147483648" r:id="Rec70fb26483c4f62"/>
   </p:sldMasterIdLst>
   <p:notesMasterIdLst>
-    <p:notesMasterId xmlns:r="http://schemas.openxmlformats.org/officeDocument/2006/relationships" r:id="R8aa8079668ce4f5d"/>
+    <p:notesMasterId xmlns:r="http://schemas.openxmlformats.org/officeDocument/2006/relationships" r:id="Ra36ae287b9f04d6a"/>
   </p:notesMasterIdLst>
   <p:sldIdLst>
-    <p:sldId xmlns:r="http://schemas.openxmlformats.org/officeDocument/2006/relationships" id="256" r:id="R34218d6d705e4faf"/>
-    <p:sldId xmlns:r="http://schemas.openxmlformats.org/officeDocument/2006/relationships" id="257" r:id="R4759a52dea91402b"/>
-    <p:sldId xmlns:r="http://schemas.openxmlformats.org/officeDocument/2006/relationships" id="258" r:id="Rab79dfe489c3476f"/>
+    <p:sldId xmlns:r="http://schemas.openxmlformats.org/officeDocument/2006/relationships" id="256" r:id="R0cc109f8dca940c8"/>
+    <p:sldId xmlns:r="http://schemas.openxmlformats.org/officeDocument/2006/relationships" id="257" r:id="Re9fe549f078e4445"/>
+    <p:sldId xmlns:r="http://schemas.openxmlformats.org/officeDocument/2006/relationships" id="258" r:id="R9f5a4c0801804351"/>
   </p:sldIdLst>
   <p:sldSz cx="12192000" cy="6858000"/>
   <p:notesSz cx="6858000" cy="9144000"/>
@@ -747,7 +747,7 @@
   </p:cSld>
   <p:clrMap bg1="lt1" tx1="dk1" bg2="lt2" tx2="dk2" accent1="accent1" accent2="accent2" accent3="accent3" accent4="accent4" accent5="accent5" accent6="accent6" hlink="hlink" folHlink="folHlink"/>
   <p:sldLayoutIdLst>
-    <p:sldLayoutId xmlns:r="http://schemas.openxmlformats.org/officeDocument/2006/relationships" id="2147483649" r:id="R5fcf7fcfe9f34a7d"/>
+    <p:sldLayoutId xmlns:r="http://schemas.openxmlformats.org/officeDocument/2006/relationships" id="2147483649" r:id="R2d4d701cfc1f46a4"/>
   </p:sldLayoutIdLst>
   <p:txStyles>
     <p:titleStyle>
@@ -1295,7 +1295,7 @@
           <p:nvPr/>
         </p:nvPicPr>
         <p:blipFill>
-          <a:blip xmlns:r="http://schemas.openxmlformats.org/officeDocument/2006/relationships" xmlns:a="http://schemas.openxmlformats.org/drawingml/2006/main" r:embed="Rac75d51ffc174b4b"/>
+          <a:blip xmlns:r="http://schemas.openxmlformats.org/officeDocument/2006/relationships" xmlns:a="http://schemas.openxmlformats.org/drawingml/2006/main" r:embed="R3a4e360713a74eec"/>
           <a:srcRect xmlns:a="http://schemas.openxmlformats.org/drawingml/2006/main" l="0" t="27" r="0" b="27"/>
           <a:stretch xmlns:a="http://schemas.openxmlformats.org/drawingml/2006/main">
             <a:fillRect l="0" t="0" r="0" b="0"/>
@@ -1531,14 +1531,21 @@
             <a:pPr algn="ctr">
               <a:buNone/>
               <a:defRPr sz="1875" b="1">
-                <a:solidFill>
-                  <a:srgbClr val="FFFFFF"/>
+                <a:ln w="0">
+                  <a:noFill/>
+                  <a:prstDash val="solid"/>
+                </a:ln>
+                <a:solidFill>
+                  <a:srgbClr val="F5E7C3"/>
                 </a:solidFill>
               </a:defRPr>
             </a:pPr>
             <a:r>
               <a:rPr sz="1875">
-                <a:ln w="0"/>
+                <a:ln w="0">
+                  <a:noFill/>
+                  <a:prstDash val="solid"/>
+                </a:ln>
                 <a:solidFill>
                   <a:srgbClr val="F5E7C3"/>
                 </a:solidFill>
@@ -1557,14 +1564,21 @@
             <a:pPr algn="ctr">
               <a:buNone/>
               <a:defRPr sz="1875" b="1">
-                <a:solidFill>
-                  <a:srgbClr val="FFFFFF"/>
+                <a:ln w="0">
+                  <a:noFill/>
+                  <a:prstDash val="solid"/>
+                </a:ln>
+                <a:solidFill>
+                  <a:srgbClr val="F5E7C3"/>
                 </a:solidFill>
               </a:defRPr>
             </a:pPr>
             <a:r>
               <a:rPr sz="1875">
-                <a:ln w="0"/>
+                <a:ln w="0">
+                  <a:noFill/>
+                  <a:prstDash val="solid"/>
+                </a:ln>
                 <a:solidFill>
                   <a:srgbClr val="F5E7C3"/>
                 </a:solidFill>
@@ -1615,6 +1629,10 @@
             <a:pPr>
               <a:buNone/>
               <a:defRPr sz="1200" b="0">
+                <a:ln w="0">
+                  <a:noFill/>
+                  <a:prstDash val="solid"/>
+                </a:ln>
                 <a:solidFill>
                   <a:srgbClr val="FFFFFF"/>
                 </a:solidFill>
@@ -1622,7 +1640,10 @@
             </a:pPr>
             <a:r>
               <a:rPr sz="1200">
-                <a:ln w="0"/>
+                <a:ln w="0">
+                  <a:noFill/>
+                  <a:prstDash val="solid"/>
+                </a:ln>
                 <a:solidFill>
                   <a:srgbClr val="FFFFFF"/>
                 </a:solidFill>
@@ -1641,6 +1662,10 @@
             <a:pPr>
               <a:buNone/>
               <a:defRPr sz="1200" b="0">
+                <a:ln w="0">
+                  <a:noFill/>
+                  <a:prstDash val="solid"/>
+                </a:ln>
                 <a:solidFill>
                   <a:srgbClr val="FFFFFF"/>
                 </a:solidFill>
@@ -1648,7 +1673,10 @@
             </a:pPr>
             <a:r>
               <a:rPr sz="1200">
-                <a:ln w="0"/>
+                <a:ln w="0">
+                  <a:noFill/>
+                  <a:prstDash val="solid"/>
+                </a:ln>
                 <a:solidFill>
                   <a:srgbClr val="FFFFFF"/>
                 </a:solidFill>
